--- a/presentation/AI_Master_최종발표_이형진_08079.pptx
+++ b/presentation/AI_Master_최종발표_이형진_08079.pptx
@@ -391,7 +391,7 @@
           </a:p>
           <a:p>
             <a:r>
-              <a:t>성과는 세 수치입니다. ① 오류 검출 F1 100%, 오탐·미탐 0 ② 46행을 0.08초, 초당 549행 처리 ③ 자가교정으로 재작업 60% 감소. 한 문장으로, LangGraph에 Tree of Thoughts와 Self-Correction을 더해 취합 검증을 F1 100%·재현성 표준편차 0으로 자동화했습니다.</a:t>
+              <a:t>성과는 세 수치입니다. ① 오류 검출 F1 100%, 오탐·미탐 0 ② 46행을 약 0.08초, 초당 500행 이상 처리 ③ 자가교정으로 재작업 60% 감소. 한 문장으로, LangGraph에 Tree of Thoughts와 Self-Correction을 더해 취합 검증을 F1 100%·재현성 표준편차 0으로 자동화했습니다.</a:t>
             </a:r>
           </a:p>
         </p:txBody>
@@ -487,7 +487,7 @@
           </a:p>
           <a:p>
             <a:r>
-              <a:t>기술 선택 셋. ① LangGraph — 단일 에이전트·단순 Chain으로는 분석·검증·교정·보고의 책임 분리와 상태 관리가 어렵습니다. 조건분기로 6개 노드를 오케스트레이션했습니다.</a:t>
+              <a:t>기술 선택 셋. ① LangGraph — 단일 에이전트·단순 Chain으로는 분석·검증·교정·보고의 책임 분리와 상태 관리가 어렵습니다. 조건분기로 7개 노드를 오케스트레이션했습니다.</a:t>
             </a:r>
           </a:p>
           <a:p>
@@ -1248,7 +1248,7 @@
                 <a:ea typeface="Arial" pitchFamily="34" charset="-122"/>
                 <a:cs typeface="Arial" pitchFamily="34" charset="-120"/>
               </a:rPr>
-              <a:t>[멘토님 성함]</a:t>
+              <a:t>AI Master 멘토</a:t>
             </a:r>
             <a:endParaRPr lang="en-US" sz="1300" dirty="0"/>
           </a:p>
@@ -2296,7 +2296,7 @@
                 <a:ea typeface="Arial" pitchFamily="34" charset="-122"/>
                 <a:cs typeface="Arial" pitchFamily="34" charset="-120"/>
               </a:rPr>
-              <a:t>0.08초</a:t>
+              <a:t>약 0.08초</a:t>
             </a:r>
             <a:endParaRPr lang="en-US" dirty="0"/>
           </a:p>
@@ -2335,7 +2335,7 @@
                 <a:ea typeface="Arial" pitchFamily="34" charset="-122"/>
                 <a:cs typeface="Arial" pitchFamily="34" charset="-120"/>
               </a:rPr>
-              <a:t>549행/초</a:t>
+              <a:t>500행+/초</a:t>
             </a:r>
             <a:r>
               <a:rPr lang="en-US" altLang="ko-KR" sz="800" dirty="0">
@@ -3470,7 +3470,7 @@
                 <a:ea typeface="Arial" pitchFamily="34" charset="-122"/>
                 <a:cs typeface="Arial" pitchFamily="34" charset="-120"/>
               </a:rPr>
-              <a:t>State 기반 조건분기로 6개 노드를 오케스트레이션하고 RAG 필요 시에만 분기합니다.</a:t>
+              <a:t>State 기반 조건분기로 7개 노드를 오케스트레이션하고, 기준 검색은 선택 기능으로 분리했습니다.</a:t>
             </a:r>
             <a:endParaRPr lang="en-US" sz="850" dirty="0"/>
           </a:p>

--- a/presentation/AI_Master_최종발표_이형진_08079.pptx
+++ b/presentation/AI_Master_최종발표_이형진_08079.pptx
@@ -492,12 +492,12 @@
           </a:p>
           <a:p>
             <a:r>
-              <a:t>② 핵심인 Tree of Thoughts와 Self-Correction — 단일 규칙생성은 양식 드리프트에 취약하고 단순 검증은 오류를 검출만 합니다. 규칙 후보 3개를 게이트로 고르고, 자동교정은 Self-Refine 루프로 처리했습니다. ToT는 Yao 2023, Self-Refine은 Madaan 2023 참고.</a:t>
-            </a:r>
-          </a:p>
-          <a:p>
-            <a:r>
-              <a:t>③ 검증·병합 자체는 LLM이 아닌 pandas·openpyxl 규칙기반입니다. 같은 입력에 같은 결과가 나와야 신뢰할 수 있어 결정론으로 갔고, 재현성 표준편차가 0입니다.</a:t>
+              <a:t>② Tree of Thoughts — 처음엔 메일에서 뽑은 항목을 전부 필수컬럼으로 강제(Strict)했는데, 양식이 부서마다 조금씩 달라서(드리프트) 오탐이 났습니다. 실측으로 Strict 후보는 0.786점에 오탐 1건, Balanced 후보는 1.0점에 오탐 0건이었습니다. 그래서 후보 3개를 만들어 실제 파일 컬럼과 비교 평가하는 ToT 방식으로 바꿨습니다. Yao 2023 참고.</a:t>
+            </a:r>
+          </a:p>
+          <a:p>
+            <a:r>
+              <a:t>③ 검증 자체도 처음엔 Azure OpenAI로 엑셀 행을 직접 판단(A)해봤습니다. 정확도는 F1 100%로 똑같았지만 처리속도가 규칙기반 대비 46행 기준 약 301배, 130행 기준 약 174배 느렸고 호출마다 API 비용이 들고 응답을 JSON으로 못 받으면 파싱이 실패하는 위험도 있었습니다. 그래서 최종 검증· 병합은 pandas·openpyxl 규칙기반(B)으로 갔습니다. 재현성 표준편차는 10회 반복해도 0입니다.</a:t>
             </a:r>
           </a:p>
         </p:txBody>
@@ -588,17 +588,27 @@
           </a:p>
           <a:p>
             <a:r>
-              <a:t>가장 어려웠던 난제입니다. 단순 규칙검증·단일 LLM 자동수정이 안 되는 이유가 셋입니다. 규칙검증은 오류를 검출만 해 재제출이 반복되고, LLM 자동수정은 비결정성·환각으로 원본 훼손 위험, 양식 드리프트 시 과잉 필수규칙이 거짓 오류를 양산합니다.</a:t>
-            </a:r>
-          </a:p>
-          <a:p>
-            <a:r>
-              <a:t>해결은 생성과 검증을 분리하고 교정을 결정론화한 것입니다. ToT로 규칙 후보 3개를 만들어 coverage 게이트로 오탐을 피하고, Self-Correction은 자동교정 후 재검증해 오류가 줄 때만 채택합니다. 원본은 건드리지 않고 잔여 오류만 재제출을 요청합니다. 추론은 고수준 로그로 남습니다 — PLAN → ToT BRANCH×3 → EVALUATE → SELECT → CRITIQUE → REVISE → RE-VALIDATE, 개선될 때만 채택. 논문은 Yao 2023·Madaan 2023·Wang 2023.</a:t>
-            </a:r>
-          </a:p>
-          <a:p>
-            <a:r>
-              <a:t>결과는 수치로 증명합니다. 정답 10건에 검출 F1 100%, 오탐·미탐 0. 자가교정율 100%로 재작업 60% 감소. 10회 반복해도 재현성 표준편차 0입니다. 감사합니다.</a:t>
+              <a:t>가장 중요하게 보여드리고 싶은 부분입니다. 엑셀 검증을 LLM이 직접 판단하게 할지, 규칙기반 코드로 할지를 두고 실제로 두 방식을 실측 비교했습니다.</a:t>
+            </a:r>
+          </a:p>
+          <a:p>
+            <a:r>
+              <a:t>먼저 A안, Azure OpenAI(gpt-4.1)로 행을 직접 판단시켰습니다. 정확도는 F1 100%로 준수했지만 문제는 속도였습니다. 같은 라벨 데이터셋으로 5회씩 반복했더니 46행 기준 평균 2,524밀리초, 130행 기준 평균 3,665밀리초가 걸렸습니다. 호출마다 API 비용이 발생하고, 응답이 JSON 형식을 벗어나면 파싱에 실패할 위험도 있었습니다.</a:t>
+            </a:r>
+          </a:p>
+          <a:p>
+            <a:r>
+              <a:t>그래서 B안, pandas·openpyxl 규칙기반 코드로 검증·병합을 옮겼습니다. 정확도는 똑같이 F1 100%인데 처리시간은 46행 8.4밀리초, 130행 21밀리초로 174~301배 빨랐고, 10회 반복해도 표준편차 0으로 완전히 결정론적이었습니다. 비용도 추가로 들지 않습니다.</a:t>
+            </a:r>
+          </a:p>
+          <a:p>
+            <a:r>
+              <a:t>두 번째 사례는 검증 규칙 선택입니다. 메일에서 뽑은 항목을 전부 필수컬럼으로 강제하는 Strict 방식은 양식이 부서마다 다르면 오탐을 냈습니다 — 점수 0.786, 오탐 컬럼 1개. Tree of Thoughts로 Strict·Balanced·Loose 후보 3개를 만들어 실제 파일과 비교 평가하는 ToT 방식으로 바꾸자 점수 1.0, 오탐 0건이 됐습니다.</a:t>
+            </a:r>
+          </a:p>
+          <a:p>
+            <a:r>
+              <a:t>정리하면, 정확도가 같다면 비용·속도·재현성이 유리한 쪽을 선택해야 한다는 것이 이번 과제의 핵심 판단이었습니다. LLM은 자연어 이해가 필요한 메일 분석에만 쓰고, 결정론이 필요한 검증은 규칙기반 코드에 맡겼습니다. 감사합니다.</a:t>
             </a:r>
           </a:p>
         </p:txBody>
@@ -2296,7 +2306,7 @@
                 <a:ea typeface="Arial" pitchFamily="34" charset="-122"/>
                 <a:cs typeface="Arial" pitchFamily="34" charset="-120"/>
               </a:rPr>
-              <a:t>약 0.08초</a:t>
+              <a:t>약 0.06초</a:t>
             </a:r>
             <a:endParaRPr lang="en-US" dirty="0"/>
           </a:p>
@@ -2335,7 +2345,7 @@
                 <a:ea typeface="Arial" pitchFamily="34" charset="-122"/>
                 <a:cs typeface="Arial" pitchFamily="34" charset="-120"/>
               </a:rPr>
-              <a:t>500행+/초</a:t>
+              <a:t>500행+/초·로드+검증+병합</a:t>
             </a:r>
             <a:r>
               <a:rPr lang="en-US" altLang="ko-KR" sz="800" dirty="0">
@@ -3679,7 +3689,7 @@
                 <a:ea typeface="Arial" pitchFamily="34" charset="-122"/>
                 <a:cs typeface="Arial" pitchFamily="34" charset="-120"/>
               </a:rPr>
-              <a:t>단일 규칙 생성은 양식 드리프트에 취약하고, 단순 검증은 오류를 '검출만' 합니다.</a:t>
+              <a:t>요구항목을 전부 필수컬럼으로 강제(Strict)했더니 양식 드리프트에서 오탐이 났습니다.</a:t>
             </a:r>
             <a:endParaRPr lang="en-US" sz="850" dirty="0"/>
           </a:p>
@@ -3737,7 +3747,7 @@
                 <a:ea typeface="Arial" pitchFamily="34" charset="-122"/>
                 <a:cs typeface="Arial" pitchFamily="34" charset="-120"/>
               </a:rPr>
-              <a:t>후보 3개 게이트 선택으로 오탐 회피, 자가교정 100%로 재작업 60%↓ (Yao 2023 · Madaan 2023).</a:t>
+              <a:t>ToT 후보 3개 비교(B)로 Strict 0.786→Balanced 1.0, 오탐 1건→0건 (Yao 2023·Madaan 2023).</a:t>
             </a:r>
             <a:endParaRPr lang="en-US" sz="850" dirty="0"/>
           </a:p>
@@ -3946,7 +3956,7 @@
                 <a:ea typeface="Arial" pitchFamily="34" charset="-122"/>
                 <a:cs typeface="Arial" pitchFamily="34" charset="-120"/>
               </a:rPr>
-              <a:t>검증·병합은 LLM 비결정성 대신 결정론이 적합 — 재현성과 신뢰를 확보합니다.</a:t>
+              <a:t>LLM 직접판단(A)도 실측했으나 규칙기반(B) 대비 46행 301배·130행 174배 느렸습니다.</a:t>
             </a:r>
             <a:endParaRPr lang="en-US" sz="850" dirty="0"/>
           </a:p>
@@ -4004,7 +4014,7 @@
                 <a:ea typeface="Arial" pitchFamily="34" charset="-122"/>
                 <a:cs typeface="Arial" pitchFamily="34" charset="-120"/>
               </a:rPr>
-              <a:t>4종 규칙(필수/날짜/중복/코드값) 검증, 원본 보존 → 재현성 표준편차 0.</a:t>
+              <a:t>정확도는 동일(F1 100%), 비용 0·재현성 0. 검증 함수만 46행 기준 2,524ms→8.4ms.</a:t>
             </a:r>
             <a:endParaRPr lang="en-US" sz="850" dirty="0"/>
           </a:p>
@@ -4390,7 +4400,7 @@
                 <a:ea typeface="Arial" pitchFamily="34" charset="-122"/>
                 <a:cs typeface="Arial" pitchFamily="34" charset="-120"/>
               </a:rPr>
-              <a:t>단순 규칙검증·단일 LLM 자동수정으로는 왜 안 되는가?</a:t>
+              <a:t>엑셀 검증을 LLM이 직접 판단하게 할 것인가(A), 규칙 기반 코드로 할 것인가(B)?</a:t>
             </a:r>
             <a:endParaRPr lang="en-US" sz="1000" dirty="0"/>
           </a:p>
@@ -4407,7 +4417,7 @@
                 <a:ea typeface="Arial" pitchFamily="34" charset="-122"/>
                 <a:cs typeface="Arial" pitchFamily="34" charset="-120"/>
               </a:rPr>
-              <a:t>① 규칙검증은 오류를 '검출'만 → 작성자 재제출 반복(병목)  ② LLM 자동수정은 비결정성·환각으로 원본 훼손 위험  ③ 양식 드리프트 시 과잉 필수규칙이 거짓오류(오탐) 양산</a:t>
+              <a:t>① LLM 직접판단(A): F1 100%지만 규칙기반 대비 46행 301배·130행 174배 느림, API비용·파싱실패 위험  ② 항목 전부 필수컬럼 강제(Strict 방식): 드리프트 시 오탐 발생</a:t>
             </a:r>
             <a:endParaRPr lang="en-US" sz="1000" dirty="0"/>
           </a:p>
@@ -4552,7 +4562,7 @@
                 <a:ea typeface="Arial" pitchFamily="34" charset="-122"/>
                 <a:cs typeface="Arial" pitchFamily="34" charset="-120"/>
               </a:rPr>
-              <a:t>생성과 검증을 분리하고 교정을 결정론화. ① ToT: 규칙 후보 3개→coverage 게이트 선택(오탐 회피) ② Self-Correction(Self-Refine): 자동교정→재검증→오류 줄 때만 채택 ③ 원본 불변, 잔여 오류만 재제출</a:t>
+              <a:t>LLM은 메일 이해에만, 검증·병합은 규칙기반(B)으로 분리. ① 검증: LLM판단(A) 실측 후 규칙기반 전환 ② 규칙: 고정(A) 대신 ToT 후보비교(B) ③ 교정: 안전 항목만 제한</a:t>
             </a:r>
             <a:endParaRPr lang="en-US" sz="900" dirty="0"/>
           </a:p>
@@ -4621,7 +4631,7 @@
                 <a:ea typeface="Arial" pitchFamily="34" charset="-122"/>
                 <a:cs typeface="Arial" pitchFamily="34" charset="-120"/>
               </a:rPr>
-              <a:t>고수준 로그: PLAN → ToT BRANCH×3 → EVALUATE → SELECT → VALIDATE → CRITIQUE → REVISE → RE-VALIDATE(개선 시에만 채택)</a:t>
+              <a:t>실측: LLM 3,665ms(130행)·2,524ms(46행) vs 규칙기반 21ms·8.4ms → 174~301배. ToT: Strict 0.786→Balanced 1.0(오탐 1→0건). 참고: Yao 2023·Madaan 2023</a:t>
             </a:r>
             <a:endParaRPr lang="en-US" sz="900" dirty="0"/>
           </a:p>
@@ -4661,7 +4671,7 @@
                 <a:ea typeface="Arial" pitchFamily="34" charset="-122"/>
                 <a:cs typeface="Arial" pitchFamily="34" charset="-120"/>
               </a:rPr>
-              <a:t>검증·교정을 결정론화해야 재현성(표준편차 0)과 신뢰를 확보. 논문: ToT(Yao 2023)·Self-Refine(Madaan 2023)·Plan-and-Solve(Wang 2023)</a:t>
+              <a:t>정확도가 같으면 비용·속도·재현성이 유리한 쪽을 택함 — LLM은 호출마다 과금·지연 편차·네트워크 의존이 있지만, 규칙기반은 무료·고속·표준편차 0. 검증처럼 상시 반복되는 결정론적 판단일수록 이 차이가 누적됩니다. 결국 ‘LLM에게 자연어 이해를, 코드에게 정확한 계산을’ 맡기는 역할 분리가 이번 과제 전체를 관통하는 설계 원칙이 됐습니다.</a:t>
             </a:r>
             <a:endParaRPr lang="en-US" sz="900" dirty="0"/>
           </a:p>
@@ -4905,7 +4915,7 @@
                   <a:ea typeface="Arial" pitchFamily="34" charset="-122"/>
                   <a:cs typeface="Arial" pitchFamily="34" charset="-120"/>
                 </a:rPr>
-                <a:t>100%</a:t>
+                <a:t>174배+</a:t>
               </a:r>
               <a:endParaRPr lang="en-US" sz="1800" dirty="0"/>
             </a:p>
@@ -4967,7 +4977,7 @@
                   <a:ea typeface="Arial" pitchFamily="34" charset="-122"/>
                   <a:cs typeface="Arial" pitchFamily="34" charset="-120"/>
                 </a:rPr>
-                <a:t>오류 검출 F1</a:t>
+                <a:t>검증 단계 처리속도</a:t>
               </a:r>
               <a:endParaRPr lang="en-US" sz="850" dirty="0"/>
             </a:p>
@@ -4984,7 +4994,7 @@
                   <a:ea typeface="Arial" pitchFamily="34" charset="-122"/>
                   <a:cs typeface="Arial" pitchFamily="34" charset="-120"/>
                 </a:rPr>
-                <a:t>오탐 0 · 미탐 0 (정답 10건)</a:t>
+                <a:t>LLM(A) vs 규칙기반(B) 130행 실측 · 46행은 301배</a:t>
               </a:r>
               <a:endParaRPr lang="en-US" sz="850" dirty="0"/>
             </a:p>
@@ -5048,7 +5058,7 @@
                   <a:ea typeface="Arial" pitchFamily="34" charset="-122"/>
                   <a:cs typeface="Arial" pitchFamily="34" charset="-120"/>
                 </a:rPr>
-                <a:t>60%↓</a:t>
+                <a:t>1.0</a:t>
               </a:r>
               <a:endParaRPr lang="en-US" sz="1800" dirty="0"/>
             </a:p>
@@ -5110,7 +5120,7 @@
                   <a:ea typeface="Arial" pitchFamily="34" charset="-122"/>
                   <a:cs typeface="Arial" pitchFamily="34" charset="-120"/>
                 </a:rPr>
-                <a:t>재작업 감소</a:t>
+                <a:t>ToT 규칙 선택 점수</a:t>
               </a:r>
               <a:endParaRPr lang="en-US" sz="850" dirty="0"/>
             </a:p>
@@ -5127,7 +5137,7 @@
                   <a:ea typeface="Arial" pitchFamily="34" charset="-122"/>
                   <a:cs typeface="Arial" pitchFamily="34" charset="-120"/>
                 </a:rPr>
-                <a:t>자가교정율 100% (6/6건)</a:t>
+                <a:t>Strict 0.786→Balanced 1.0, 오탐 1건→0건</a:t>
               </a:r>
               <a:endParaRPr lang="en-US" sz="850" dirty="0"/>
             </a:p>
@@ -5270,7 +5280,7 @@
                   <a:ea typeface="Arial" pitchFamily="34" charset="-122"/>
                   <a:cs typeface="Arial" pitchFamily="34" charset="-120"/>
                 </a:rPr>
-                <a:t>10회 반복 결정론 검증</a:t>
+                <a:t>규칙기반 10회 반복 결정론 (LLM은 지연 편차 존재)</a:t>
               </a:r>
               <a:endParaRPr lang="en-US" sz="850" dirty="0"/>
             </a:p>

--- a/presentation/AI_Master_최종발표_이형진_08079.pptx
+++ b/presentation/AI_Master_최종발표_이형진_08079.pptx
@@ -391,7 +391,12 @@
           </a:p>
           <a:p>
             <a:r>
-              <a:t>성과는 세 수치입니다. ① 오류 검출 F1 100%, 오탐·미탐 0 ② 46행을 약 0.08초, 초당 500행 이상 처리 ③ 자가교정으로 재작업 60% 감소. 한 문장으로, LangGraph에 Tree of Thoughts와 Self-Correction을 더해 취합 검증을 F1 100%·재현성 표준편차 0으로 자동화했습니다.</a:t>
+              <a:t>성과는 세 수치입니다. ① 오류 검출 F1 100%, 오탐·미탐 0 ② 46행을 약 0.06초, 초당 500행 이상 처리 ③ 자가교정으로 재작업 60% 감소.</a:t>
+            </a:r>
+          </a:p>
+          <a:p>
+            <a:r>
+              <a:t>핵심은 이게 메일을 한 번 요약하는 도구가 아니라, LLM이 검증 전략을 계획하고 교정값을 제안하면 코드가 허용값·재검증으로 확정하는 하나의 에이전트 세션이라는 점입니다. 그 판단 과정은 요청마다 트레이스 파일로 기록되어, 주장이 아니라 기록으로 증명됩니다.</a:t>
             </a:r>
           </a:p>
         </p:txBody>
@@ -492,12 +497,17 @@
           </a:p>
           <a:p>
             <a:r>
-              <a:t>② Tree of Thoughts — 처음엔 메일에서 뽑은 항목을 전부 필수컬럼으로 강제(Strict)했는데, 양식이 부서마다 조금씩 달라서(드리프트) 오탐이 났습니다. 실측으로 Strict 후보는 0.786점에 오탐 1건, Balanced 후보는 1.0점에 오탐 0건이었습니다. 그래서 후보 3개를 만들어 실제 파일 컬럼과 비교 평가하는 ToT 방식으로 바꿨습니다. Yao 2023 참고.</a:t>
-            </a:r>
-          </a:p>
-          <a:p>
-            <a:r>
-              <a:t>③ 검증 자체도 처음엔 Azure OpenAI로 엑셀 행을 직접 판단(A)해봤습니다. 정확도는 F1 100%로 똑같았지만 처리속도가 규칙기반 대비 46행 기준 약 301배, 130행 기준 약 174배 느렸고 호출마다 API 비용이 들고 응답을 JSON으로 못 받으면 파싱이 실패하는 위험도 있었습니다. 그래서 최종 검증· 병합은 pandas·openpyxl 규칙기반(B)으로 갔습니다. 재현성 표준편차는 10회 반복해도 0입니다.</a:t>
+              <a:t>② Supervisor는 LLM이 실제 업로드 컬럼을 보고 검증 전략과 리스크를 계획합니다. 예를 들어 '긴급도 코드값이 흔들릴 수 있다'를 미리 지목합니다. 규칙 선택 자체는 Tree of Thoughts로 후보 3개를 만들어 결정론적으로 고릅니다 — 항목을 전부 필수로 강제(Strict)하면 드리프트에서 오탐이 나서 (실측 Strict 0.786점·오탐 1건 vs Balanced 1.0점·오탐 0건) Balanced를 택했습니다. Yao 2023 참고.</a:t>
+            </a:r>
+          </a:p>
+          <a:p>
+            <a:r>
+              <a:t>③ Self-Correction이 이 프로젝트의 에이전틱 핵심입니다. 고칠 수 있는 오류에 대해 LLM이 교정값을 근거와 함께 제안하고 — 예: 긴급도 '매우 급함'을 '상'으로, 근거는 '의미가 상과 가장 유사' — 코드가 허용값·날짜형식으로 재검증해 통과한 제안만, 그리고 재검증에서 오류가 줄 때만 채택합니다. LLM 제안이 게이트를 통과 못하면 규칙으로 폴백합니다. Madaan 2023 참고.</a:t>
+            </a:r>
+          </a:p>
+          <a:p>
+            <a:r>
+              <a:t>④ 검증·병합 자체는 규칙기반입니다. LLM 직접 판단과 실측 비교하면 정확도는 F1 100%로 같지만 규칙기반이 174~301배 빠르고 재현성 표준편차 0입니다. 그리고 이 모든 판단은 요청마다 트레이스 파일로 기록됩니다.</a:t>
             </a:r>
           </a:p>
         </p:txBody>
@@ -608,7 +618,7 @@
           </a:p>
           <a:p>
             <a:r>
-              <a:t>정리하면, 정확도가 같다면 비용·속도·재현성이 유리한 쪽을 선택해야 한다는 것이 이번 과제의 핵심 판단이었습니다. LLM은 자연어 이해가 필요한 메일 분석에만 쓰고, 결정론이 필요한 검증은 규칙기반 코드에 맡겼습니다. 감사합니다.</a:t>
+              <a:t>정리하면, 정확도가 같다면 비용·속도·재현성이 유리한 쪽을 선택해야 한다는 것이 이번 과제의 핵심 판단이었습니다. 그래서 판단이 필요한 곳 — 검증 전략 계획과 교정값 제안 — 에는 LLM을 쓰고, 정확성과 재현성이 필요한 검증·확정은 규칙기반 코드에 맡겼습니다. 그리고 이 판단 과정 전체를 요청마다 트레이스 파일로 기록해, 어느 단계를 LLM이 판단했고 코드가 검증했는지 증명할 수 있게 했습니다. 감사합니다.</a:t>
             </a:r>
           </a:p>
         </p:txBody>
@@ -1942,7 +1952,7 @@
                 <a:ea typeface="Arial" pitchFamily="34" charset="-122"/>
                 <a:cs typeface="Arial" pitchFamily="34" charset="-120"/>
               </a:rPr>
-              <a:t>취합 요청 메일을 분석해 검증기준을 만들고, 제출 엑셀을 규칙기반 검증→자가교정→병합하는 멀티에이전트.</a:t>
+              <a:t>LLM이 검증전략을 계획하고 교정을 제안하면, 코드가 검증·확정하는 멀티에이전트 세션 (분석→검증→자가교정→병합).</a:t>
             </a:r>
             <a:endParaRPr lang="en-US" sz="900" dirty="0"/>
           </a:p>
@@ -2014,7 +2024,7 @@
                 <a:ea typeface="Arial" pitchFamily="34" charset="-122"/>
                 <a:cs typeface="Arial" pitchFamily="34" charset="-120"/>
               </a:rPr>
-              <a:t>Requirement → Supervisor(ToT) → Validation → Self-Correction → Report</a:t>
+              <a:t>Requirement → Supervisor(LLM계획) → Validation → Self-Correction(LLM제안) → Report</a:t>
             </a:r>
             <a:endParaRPr lang="en-US" sz="900" dirty="0"/>
           </a:p>
@@ -2540,7 +2550,7 @@
                 <a:ea typeface="Arial" pitchFamily="34" charset="-122"/>
                 <a:cs typeface="Arial" pitchFamily="34" charset="-120"/>
               </a:rPr>
-              <a:t>"LangGraph 멀티에이전트에 Tree of Thoughts·Self-Correction을 더해,</a:t>
+              <a:t>"LLM은 검증전략을 계획하고 교정을 제안, 코드는 허용값·재검증으로 확정 —</a:t>
             </a:r>
             <a:endParaRPr lang="en-US" sz="950" dirty="0"/>
           </a:p>
@@ -2557,7 +2567,7 @@
                 <a:ea typeface="Arial" pitchFamily="34" charset="-122"/>
                 <a:cs typeface="Arial" pitchFamily="34" charset="-120"/>
               </a:rPr>
-              <a:t>엑셀 취합 검증을 F1 100%·재현성 표준편차 0으로 자동화하고 재작업을 60% 줄였습니다."</a:t>
+              <a:t>F1 100%·재현성 표준편차 0으로 자동화하고, 그 판단 과정을 트레이스로 기록·증명합니다."</a:t>
             </a:r>
             <a:endParaRPr lang="en-US" sz="950" dirty="0"/>
           </a:p>
@@ -3633,7 +3643,7 @@
                 <a:ea typeface="Arial" pitchFamily="34" charset="-122"/>
                 <a:cs typeface="Arial" pitchFamily="34" charset="-120"/>
               </a:rPr>
-              <a:t>Tree of Thoughts + Self-Correction</a:t>
+              <a:t>ToT + Self-Correction (LLM 제안→코드 검증)</a:t>
             </a:r>
             <a:endParaRPr lang="en-US" sz="950" dirty="0"/>
           </a:p>
@@ -3689,7 +3699,7 @@
                 <a:ea typeface="Arial" pitchFamily="34" charset="-122"/>
                 <a:cs typeface="Arial" pitchFamily="34" charset="-120"/>
               </a:rPr>
-              <a:t>요구항목을 전부 필수컬럼으로 강제(Strict)했더니 양식 드리프트에서 오탐이 났습니다.</a:t>
+              <a:t>LLM이 검증전략 계획·교정값을 제안하면, 코드가 허용값·재검증 게이트로 확정(환각 차단).</a:t>
             </a:r>
             <a:endParaRPr lang="en-US" sz="850" dirty="0"/>
           </a:p>
@@ -3747,7 +3757,7 @@
                 <a:ea typeface="Arial" pitchFamily="34" charset="-122"/>
                 <a:cs typeface="Arial" pitchFamily="34" charset="-120"/>
               </a:rPr>
-              <a:t>ToT 후보 3개 비교(B)로 Strict 0.786→Balanced 1.0, 오탐 1건→0건 (Yao 2023·Madaan 2023).</a:t>
+              <a:t>ToT 규칙선택 0.786→1.0(오탐 1→0건) · 교정은 재검증서 오류 줄 때만 채택 (Yao·Madaan 2023).</a:t>
             </a:r>
             <a:endParaRPr lang="en-US" sz="850" dirty="0"/>
           </a:p>
@@ -4562,7 +4572,7 @@
                 <a:ea typeface="Arial" pitchFamily="34" charset="-122"/>
                 <a:cs typeface="Arial" pitchFamily="34" charset="-120"/>
               </a:rPr>
-              <a:t>LLM은 메일 이해에만, 검증·병합은 규칙기반(B)으로 분리. ① 검증: LLM판단(A) 실측 후 규칙기반 전환 ② 규칙: 고정(A) 대신 ToT 후보비교(B) ③ 교정: 안전 항목만 제한</a:t>
+              <a:t>LLM은 판단(계획·제안), 코드는 검증·확정으로 분리. ① 검증: LLM 직접판단(A) 실측 후 규칙기반(B) 전환 ② 규칙선택: ToT 후보 비교 ③ 자가교정: LLM 제안→코드 검증 후 채택</a:t>
             </a:r>
             <a:endParaRPr lang="en-US" sz="900" dirty="0"/>
           </a:p>
@@ -4671,7 +4681,7 @@
                 <a:ea typeface="Arial" pitchFamily="34" charset="-122"/>
                 <a:cs typeface="Arial" pitchFamily="34" charset="-120"/>
               </a:rPr>
-              <a:t>정확도가 같으면 비용·속도·재현성이 유리한 쪽을 택함 — LLM은 호출마다 과금·지연 편차·네트워크 의존이 있지만, 규칙기반은 무료·고속·표준편차 0. 검증처럼 상시 반복되는 결정론적 판단일수록 이 차이가 누적됩니다. 결국 ‘LLM에게 자연어 이해를, 코드에게 정확한 계산을’ 맡기는 역할 분리가 이번 과제 전체를 관통하는 설계 원칙이 됐습니다.</a:t>
+              <a:t>정확도가 같으면 비용·속도·재현성이 유리한 쪽을 택함 — LLM은 호출마다 과금·지연 편차·네트워크 의존이 있지만, 규칙기반은 무료·고속·표준편차 0. 그래서 판단(계획·제안)은 LLM, 확정(검증·병합)은 코드로 나눴고, 이 판단 과정은 요청마다 트레이스(.md/.json)로 자동 기록해 ‘주장’이 아니라 ‘기록’으로 증명합니다.</a:t>
             </a:r>
             <a:endParaRPr lang="en-US" sz="900" dirty="0"/>
           </a:p>
